--- a/presentation/parametric-faithfulness.pptx
+++ b/presentation/parametric-faithfulness.pptx
@@ -5,7 +5,7 @@
     <p:sldMasterId id="2147483648" r:id="rId1"/>
   </p:sldMasterIdLst>
   <p:notesMasterIdLst>
-    <p:notesMasterId r:id="rId20"/>
+    <p:notesMasterId r:id="rId21"/>
   </p:notesMasterIdLst>
   <p:sldIdLst>
     <p:sldId id="256" r:id="rId2"/>
@@ -24,8 +24,9 @@
     <p:sldId id="271" r:id="rId15"/>
     <p:sldId id="269" r:id="rId16"/>
     <p:sldId id="270" r:id="rId17"/>
-    <p:sldId id="274" r:id="rId18"/>
-    <p:sldId id="275" r:id="rId19"/>
+    <p:sldId id="276" r:id="rId18"/>
+    <p:sldId id="274" r:id="rId19"/>
+    <p:sldId id="275" r:id="rId20"/>
   </p:sldIdLst>
   <p:sldSz cx="12192000" cy="6858000"/>
   <p:notesSz cx="6858000" cy="9144000"/>
@@ -918,6 +919,110 @@
   <p:cSld>
     <p:spTree>
       <p:nvGrpSpPr>
+        <p:cNvPr id="1" name="">
+          <a:extLst>
+            <a:ext uri="{FF2B5EF4-FFF2-40B4-BE49-F238E27FC236}">
+              <a16:creationId xmlns:a16="http://schemas.microsoft.com/office/drawing/2014/main" id="{2EA12B42-E321-6CBB-0914-89BAEC54526A}"/>
+            </a:ext>
+          </a:extLst>
+        </p:cNvPr>
+        <p:cNvGrpSpPr/>
+        <p:nvPr/>
+      </p:nvGrpSpPr>
+      <p:grpSpPr>
+        <a:xfrm>
+          <a:off x="0" y="0"/>
+          <a:ext cx="0" cy="0"/>
+          <a:chOff x="0" y="0"/>
+          <a:chExt cx="0" cy="0"/>
+        </a:xfrm>
+      </p:grpSpPr>
+      <p:sp>
+        <p:nvSpPr>
+          <p:cNvPr id="2" name="Slide Image Placeholder 1">
+            <a:extLst>
+              <a:ext uri="{FF2B5EF4-FFF2-40B4-BE49-F238E27FC236}">
+                <a16:creationId xmlns:a16="http://schemas.microsoft.com/office/drawing/2014/main" id="{22BEB1A2-D36C-3136-F625-04D838BDCB83}"/>
+              </a:ext>
+            </a:extLst>
+          </p:cNvPr>
+          <p:cNvSpPr>
+            <a:spLocks noGrp="1" noRot="1" noChangeAspect="1"/>
+          </p:cNvSpPr>
+          <p:nvPr>
+            <p:ph type="sldImg"/>
+          </p:nvPr>
+        </p:nvSpPr>
+        <p:spPr/>
+      </p:sp>
+      <p:sp>
+        <p:nvSpPr>
+          <p:cNvPr id="3" name="Notes Placeholder 2">
+            <a:extLst>
+              <a:ext uri="{FF2B5EF4-FFF2-40B4-BE49-F238E27FC236}">
+                <a16:creationId xmlns:a16="http://schemas.microsoft.com/office/drawing/2014/main" id="{E4F15DAC-A94E-E2DB-E828-0B3741DB3238}"/>
+              </a:ext>
+            </a:extLst>
+          </p:cNvPr>
+          <p:cNvSpPr>
+            <a:spLocks noGrp="1"/>
+          </p:cNvSpPr>
+          <p:nvPr>
+            <p:ph type="body" idx="1"/>
+          </p:nvPr>
+        </p:nvSpPr>
+        <p:spPr/>
+        <p:txBody>
+          <a:bodyPr/>
+          <a:lstStyle/>
+          <a:p>
+            <a:endParaRPr/>
+          </a:p>
+        </p:txBody>
+      </p:sp>
+      <p:sp>
+        <p:nvSpPr>
+          <p:cNvPr id="4" name="Slide Number Placeholder 3">
+            <a:extLst>
+              <a:ext uri="{FF2B5EF4-FFF2-40B4-BE49-F238E27FC236}">
+                <a16:creationId xmlns:a16="http://schemas.microsoft.com/office/drawing/2014/main" id="{3FEAE984-2B1B-8280-4EC9-729AD33B5B2A}"/>
+              </a:ext>
+            </a:extLst>
+          </p:cNvPr>
+          <p:cNvSpPr>
+            <a:spLocks noGrp="1"/>
+          </p:cNvSpPr>
+          <p:nvPr>
+            <p:ph type="sldNum" idx="5"/>
+          </p:nvPr>
+        </p:nvSpPr>
+        <p:spPr/>
+        <p:txBody>
+          <a:bodyPr/>
+          <a:lstStyle/>
+          <a:p>
+            <a:endParaRPr/>
+          </a:p>
+        </p:txBody>
+      </p:sp>
+    </p:spTree>
+    <p:extLst>
+      <p:ext uri="{BB962C8B-B14F-4D97-AF65-F5344CB8AC3E}">
+        <p14:creationId xmlns:p14="http://schemas.microsoft.com/office/powerpoint/2010/main" val="4265871706"/>
+      </p:ext>
+    </p:extLst>
+  </p:cSld>
+  <p:clrMapOvr>
+    <a:masterClrMapping/>
+  </p:clrMapOvr>
+</p:notes>
+</file>
+
+<file path=ppt/notesSlides/notesSlide18.xml><?xml version="1.0" encoding="utf-8"?>
+<p:notes xmlns:a="http://schemas.openxmlformats.org/drawingml/2006/main" xmlns:r="http://schemas.openxmlformats.org/officeDocument/2006/relationships" xmlns:p="http://schemas.openxmlformats.org/presentationml/2006/main">
+  <p:cSld>
+    <p:spTree>
+      <p:nvGrpSpPr>
         <p:cNvPr id="1" name=""/>
         <p:cNvGrpSpPr/>
         <p:nvPr/>
@@ -988,7 +1093,7 @@
 </p:notes>
 </file>
 
-<file path=ppt/notesSlides/notesSlide18.xml><?xml version="1.0" encoding="utf-8"?>
+<file path=ppt/notesSlides/notesSlide19.xml><?xml version="1.0" encoding="utf-8"?>
 <p:notes xmlns:a="http://schemas.openxmlformats.org/drawingml/2006/main" xmlns:r="http://schemas.openxmlformats.org/officeDocument/2006/relationships" xmlns:p="http://schemas.openxmlformats.org/presentationml/2006/main">
   <p:cSld>
     <p:spTree>
@@ -5033,10 +5138,10 @@
       </p:pic>
       <p:pic>
         <p:nvPicPr>
-          <p:cNvPr id="25" name="图片 24">
-            <a:extLst>
-              <a:ext uri="{FF2B5EF4-FFF2-40B4-BE49-F238E27FC236}">
-                <a16:creationId xmlns:a16="http://schemas.microsoft.com/office/drawing/2014/main" id="{C4E91331-E5B4-F5C6-76A8-871DAEF41314}"/>
+          <p:cNvPr id="17" name="图片 16">
+            <a:extLst>
+              <a:ext uri="{FF2B5EF4-FFF2-40B4-BE49-F238E27FC236}">
+                <a16:creationId xmlns:a16="http://schemas.microsoft.com/office/drawing/2014/main" id="{938CC9C9-C41E-AE30-6618-49378AD0C0A3}"/>
               </a:ext>
             </a:extLst>
           </p:cNvPr>
@@ -5063,8 +5168,8 @@
         </p:blipFill>
         <p:spPr>
           <a:xfrm>
-            <a:off x="6666234" y="2101234"/>
-            <a:ext cx="4497066" cy="477867"/>
+            <a:off x="6666234" y="2110470"/>
+            <a:ext cx="4659200" cy="477867"/>
           </a:xfrm>
           <a:prstGeom prst="rect">
             <a:avLst/>
@@ -9325,74 +9430,6 @@
       </p:sp>
       <p:sp>
         <p:nvSpPr>
-          <p:cNvPr id="5" name="矩形 4">
-            <a:extLst>
-              <a:ext uri="{FF2B5EF4-FFF2-40B4-BE49-F238E27FC236}">
-                <a16:creationId xmlns:a16="http://schemas.microsoft.com/office/drawing/2014/main" id="{10F6DBEE-614A-4378-B9F0-69DF3EA12FB4}"/>
-              </a:ext>
-            </a:extLst>
-          </p:cNvPr>
-          <p:cNvSpPr>
-            <a:spLocks noGrp="1"/>
-          </p:cNvSpPr>
-          <p:nvPr/>
-        </p:nvSpPr>
-        <p:spPr>
-          <a:xfrm>
-            <a:off x="914400" y="1428750"/>
-            <a:ext cx="4857750" cy="3429000"/>
-          </a:xfrm>
-          <a:prstGeom prst="rect">
-            <a:avLst/>
-          </a:prstGeom>
-          <a:solidFill>
-            <a:srgbClr val="FBFCFF"/>
-          </a:solidFill>
-          <a:ln w="11430">
-            <a:solidFill>
-              <a:srgbClr val="9DB6E6"/>
-            </a:solidFill>
-            <a:prstDash val="solid"/>
-          </a:ln>
-        </p:spPr>
-      </p:sp>
-      <p:sp>
-        <p:nvSpPr>
-          <p:cNvPr id="6" name="矩形 5">
-            <a:extLst>
-              <a:ext uri="{FF2B5EF4-FFF2-40B4-BE49-F238E27FC236}">
-                <a16:creationId xmlns:a16="http://schemas.microsoft.com/office/drawing/2014/main" id="{DF1CE32D-6A80-4CD2-B8AC-1C4BB93E637D}"/>
-              </a:ext>
-            </a:extLst>
-          </p:cNvPr>
-          <p:cNvSpPr>
-            <a:spLocks noGrp="1"/>
-          </p:cNvSpPr>
-          <p:nvPr/>
-        </p:nvSpPr>
-        <p:spPr>
-          <a:xfrm>
-            <a:off x="914400" y="1428750"/>
-            <a:ext cx="4857750" cy="47625"/>
-          </a:xfrm>
-          <a:prstGeom prst="rect">
-            <a:avLst/>
-          </a:prstGeom>
-          <a:solidFill>
-            <a:srgbClr val="0E419C"/>
-          </a:solidFill>
-          <a:ln w="0">
-            <a:solidFill>
-              <a:srgbClr val="000000">
-                <a:alpha val="0"/>
-              </a:srgbClr>
-            </a:solidFill>
-            <a:prstDash val="solid"/>
-          </a:ln>
-        </p:spPr>
-      </p:sp>
-      <p:sp>
-        <p:nvSpPr>
           <p:cNvPr id="7" name="矩形 6">
             <a:extLst>
               <a:ext uri="{FF2B5EF4-FFF2-40B4-BE49-F238E27FC236}">
@@ -9407,8 +9444,8 @@
         </p:nvSpPr>
         <p:spPr>
           <a:xfrm>
-            <a:off x="1085850" y="1619250"/>
-            <a:ext cx="4514850" cy="304800"/>
+            <a:off x="514349" y="1218342"/>
+            <a:ext cx="5683829" cy="304800"/>
           </a:xfrm>
           <a:prstGeom prst="rect">
             <a:avLst/>
@@ -9457,22 +9494,22 @@
       </p:sp>
       <p:sp>
         <p:nvSpPr>
-          <p:cNvPr id="8" name="矩形 7">
-            <a:extLst>
-              <a:ext uri="{FF2B5EF4-FFF2-40B4-BE49-F238E27FC236}">
-                <a16:creationId xmlns:a16="http://schemas.microsoft.com/office/drawing/2014/main" id="{53C35A8F-869A-4611-BCA1-958D7D1D436F}"/>
-              </a:ext>
-            </a:extLst>
-          </p:cNvPr>
-          <p:cNvSpPr>
-            <a:spLocks noGrp="1"/>
-          </p:cNvSpPr>
-          <p:nvPr/>
-        </p:nvSpPr>
-        <p:spPr>
-          <a:xfrm>
-            <a:off x="1085850" y="2038350"/>
-            <a:ext cx="4514850" cy="2647950"/>
+          <p:cNvPr id="11" name="矩形 10">
+            <a:extLst>
+              <a:ext uri="{FF2B5EF4-FFF2-40B4-BE49-F238E27FC236}">
+                <a16:creationId xmlns:a16="http://schemas.microsoft.com/office/drawing/2014/main" id="{BE8490BB-0B37-4D3F-ABF5-3F197F68311E}"/>
+              </a:ext>
+            </a:extLst>
+          </p:cNvPr>
+          <p:cNvSpPr>
+            <a:spLocks noGrp="1"/>
+          </p:cNvSpPr>
+          <p:nvPr/>
+        </p:nvSpPr>
+        <p:spPr>
+          <a:xfrm>
+            <a:off x="6536459" y="1230849"/>
+            <a:ext cx="4514850" cy="304800"/>
           </a:xfrm>
           <a:prstGeom prst="rect">
             <a:avLst/>
@@ -9495,149 +9532,48 @@
           <a:bodyPr lIns="0" tIns="0" rIns="0" bIns="0" anchor="t"/>
           <a:lstStyle/>
           <a:p>
-            <a:pPr algn="ctr">
-              <a:defRPr sz="1125" b="0">
-                <a:solidFill>
-                  <a:srgbClr val="595959"/>
-                </a:solidFill>
-                <a:latin typeface="Tahoma"/>
-                <a:ea typeface="Tahoma"/>
-                <a:cs typeface="Tahoma"/>
-              </a:defRPr>
-            </a:pPr>
-            <a:r>
-              <a:rPr sz="1125" b="0" dirty="0">
-                <a:solidFill>
-                  <a:srgbClr val="595959"/>
-                </a:solidFill>
-                <a:latin typeface="Tahoma"/>
-                <a:ea typeface="Tahoma"/>
-                <a:cs typeface="Tahoma"/>
-              </a:rPr>
-              <a:t>Future insertion area</a:t>
-            </a:r>
-          </a:p>
-          <a:p>
-            <a:endParaRPr sz="1125" b="0" dirty="0">
-              <a:solidFill>
-                <a:srgbClr val="595959"/>
-              </a:solidFill>
-              <a:latin typeface="Tahoma"/>
-              <a:ea typeface="Tahoma"/>
-              <a:cs typeface="Tahoma"/>
-            </a:endParaRPr>
-          </a:p>
-          <a:p>
-            <a:pPr algn="ctr">
-              <a:defRPr sz="1125" b="0">
-                <a:solidFill>
-                  <a:srgbClr val="595959"/>
-                </a:solidFill>
-                <a:latin typeface="Tahoma"/>
-                <a:ea typeface="Tahoma"/>
-                <a:cs typeface="Tahoma"/>
-              </a:defRPr>
-            </a:pPr>
-            <a:r>
-              <a:rPr sz="1125" b="0" dirty="0">
-                <a:solidFill>
-                  <a:srgbClr val="595959"/>
-                </a:solidFill>
-                <a:latin typeface="Tahoma"/>
-                <a:ea typeface="Tahoma"/>
-                <a:cs typeface="Tahoma"/>
-              </a:rPr>
-              <a:t>Use this panel for the selected author table excerpt or for our reproduced sanity checks.</a:t>
-            </a:r>
-          </a:p>
-        </p:txBody>
-      </p:sp>
-      <p:sp>
-        <p:nvSpPr>
-          <p:cNvPr id="9" name="矩形 8">
-            <a:extLst>
-              <a:ext uri="{FF2B5EF4-FFF2-40B4-BE49-F238E27FC236}">
-                <a16:creationId xmlns:a16="http://schemas.microsoft.com/office/drawing/2014/main" id="{AE929BB3-F9BD-4B1E-8376-4B615A74E4BB}"/>
-              </a:ext>
-            </a:extLst>
-          </p:cNvPr>
-          <p:cNvSpPr>
-            <a:spLocks noGrp="1"/>
-          </p:cNvSpPr>
-          <p:nvPr/>
-        </p:nvSpPr>
-        <p:spPr>
-          <a:xfrm>
-            <a:off x="6438900" y="1428750"/>
-            <a:ext cx="4857750" cy="3429000"/>
-          </a:xfrm>
-          <a:prstGeom prst="rect">
-            <a:avLst/>
-          </a:prstGeom>
-          <a:solidFill>
-            <a:srgbClr val="FBFCFF"/>
-          </a:solidFill>
-          <a:ln w="11430">
-            <a:solidFill>
-              <a:srgbClr val="9DB6E6"/>
-            </a:solidFill>
-            <a:prstDash val="solid"/>
-          </a:ln>
-        </p:spPr>
-      </p:sp>
-      <p:sp>
-        <p:nvSpPr>
-          <p:cNvPr id="10" name="矩形 9">
-            <a:extLst>
-              <a:ext uri="{FF2B5EF4-FFF2-40B4-BE49-F238E27FC236}">
-                <a16:creationId xmlns:a16="http://schemas.microsoft.com/office/drawing/2014/main" id="{9861F606-BA2C-49C5-A4FF-BD5560E24DB7}"/>
-              </a:ext>
-            </a:extLst>
-          </p:cNvPr>
-          <p:cNvSpPr>
-            <a:spLocks noGrp="1"/>
-          </p:cNvSpPr>
-          <p:nvPr/>
-        </p:nvSpPr>
-        <p:spPr>
-          <a:xfrm>
-            <a:off x="6438900" y="1428750"/>
-            <a:ext cx="4857750" cy="47625"/>
-          </a:xfrm>
-          <a:prstGeom prst="rect">
-            <a:avLst/>
-          </a:prstGeom>
-          <a:solidFill>
-            <a:srgbClr val="0E419C"/>
-          </a:solidFill>
-          <a:ln w="0">
-            <a:solidFill>
-              <a:srgbClr val="000000">
-                <a:alpha val="0"/>
-              </a:srgbClr>
-            </a:solidFill>
-            <a:prstDash val="solid"/>
-          </a:ln>
-        </p:spPr>
-      </p:sp>
-      <p:sp>
-        <p:nvSpPr>
-          <p:cNvPr id="11" name="矩形 10">
-            <a:extLst>
-              <a:ext uri="{FF2B5EF4-FFF2-40B4-BE49-F238E27FC236}">
-                <a16:creationId xmlns:a16="http://schemas.microsoft.com/office/drawing/2014/main" id="{BE8490BB-0B37-4D3F-ABF5-3F197F68311E}"/>
-              </a:ext>
-            </a:extLst>
-          </p:cNvPr>
-          <p:cNvSpPr>
-            <a:spLocks noGrp="1"/>
-          </p:cNvSpPr>
-          <p:nvPr/>
-        </p:nvSpPr>
-        <p:spPr>
-          <a:xfrm>
-            <a:off x="6610350" y="1619250"/>
-            <a:ext cx="4514850" cy="304800"/>
+            <a:pPr algn="l">
+              <a:defRPr sz="1350" b="1">
+                <a:solidFill>
+                  <a:srgbClr val="0E419C"/>
+                </a:solidFill>
+                <a:latin typeface="Tahoma"/>
+                <a:ea typeface="Tahoma"/>
+                <a:cs typeface="Tahoma"/>
+              </a:defRPr>
+            </a:pPr>
+            <a:r>
+              <a:rPr sz="2000" b="1" dirty="0">
+                <a:solidFill>
+                  <a:srgbClr val="0E419C"/>
+                </a:solidFill>
+                <a:latin typeface="Tahoma"/>
+                <a:ea typeface="Tahoma"/>
+                <a:cs typeface="Tahoma"/>
+              </a:rPr>
+              <a:t>Per-cell comparison</a:t>
+            </a:r>
+          </a:p>
+        </p:txBody>
+      </p:sp>
+      <p:sp>
+        <p:nvSpPr>
+          <p:cNvPr id="14" name="矩形 13">
+            <a:extLst>
+              <a:ext uri="{FF2B5EF4-FFF2-40B4-BE49-F238E27FC236}">
+                <a16:creationId xmlns:a16="http://schemas.microsoft.com/office/drawing/2014/main" id="{57417B7F-C5B3-4857-8B63-9800F9AA310B}"/>
+              </a:ext>
+            </a:extLst>
+          </p:cNvPr>
+          <p:cNvSpPr>
+            <a:spLocks noGrp="1"/>
+          </p:cNvSpPr>
+          <p:nvPr/>
+        </p:nvSpPr>
+        <p:spPr>
+          <a:xfrm>
+            <a:off x="514350" y="6191250"/>
+            <a:ext cx="8763000" cy="304800"/>
           </a:xfrm>
           <a:prstGeom prst="rect">
             <a:avLst/>
@@ -9661,231 +9597,6 @@
           <a:lstStyle/>
           <a:p>
             <a:pPr algn="l">
-              <a:defRPr sz="1350" b="1">
-                <a:solidFill>
-                  <a:srgbClr val="0E419C"/>
-                </a:solidFill>
-                <a:latin typeface="Tahoma"/>
-                <a:ea typeface="Tahoma"/>
-                <a:cs typeface="Tahoma"/>
-              </a:defRPr>
-            </a:pPr>
-            <a:r>
-              <a:rPr sz="2000" b="1" dirty="0">
-                <a:solidFill>
-                  <a:srgbClr val="0E419C"/>
-                </a:solidFill>
-                <a:latin typeface="Tahoma"/>
-                <a:ea typeface="Tahoma"/>
-                <a:cs typeface="Tahoma"/>
-              </a:rPr>
-              <a:t>Per-cell comparison</a:t>
-            </a:r>
-          </a:p>
-        </p:txBody>
-      </p:sp>
-      <p:sp>
-        <p:nvSpPr>
-          <p:cNvPr id="12" name="矩形 11">
-            <a:extLst>
-              <a:ext uri="{FF2B5EF4-FFF2-40B4-BE49-F238E27FC236}">
-                <a16:creationId xmlns:a16="http://schemas.microsoft.com/office/drawing/2014/main" id="{E20AF000-91D5-4813-8203-25C3196B9B09}"/>
-              </a:ext>
-            </a:extLst>
-          </p:cNvPr>
-          <p:cNvSpPr>
-            <a:spLocks noGrp="1"/>
-          </p:cNvSpPr>
-          <p:nvPr/>
-        </p:nvSpPr>
-        <p:spPr>
-          <a:xfrm>
-            <a:off x="6610350" y="2038350"/>
-            <a:ext cx="4514850" cy="2647950"/>
-          </a:xfrm>
-          <a:prstGeom prst="rect">
-            <a:avLst/>
-          </a:prstGeom>
-          <a:solidFill>
-            <a:srgbClr val="000000">
-              <a:alpha val="0"/>
-            </a:srgbClr>
-          </a:solidFill>
-          <a:ln w="0">
-            <a:solidFill>
-              <a:srgbClr val="000000">
-                <a:alpha val="0"/>
-              </a:srgbClr>
-            </a:solidFill>
-            <a:prstDash val="solid"/>
-          </a:ln>
-        </p:spPr>
-        <p:txBody>
-          <a:bodyPr lIns="0" tIns="0" rIns="0" bIns="0" anchor="t"/>
-          <a:lstStyle/>
-          <a:p>
-            <a:pPr algn="ctr">
-              <a:defRPr sz="1125" b="0">
-                <a:solidFill>
-                  <a:srgbClr val="595959"/>
-                </a:solidFill>
-                <a:latin typeface="Tahoma"/>
-                <a:ea typeface="Tahoma"/>
-                <a:cs typeface="Tahoma"/>
-              </a:defRPr>
-            </a:pPr>
-            <a:r>
-              <a:rPr sz="1125" b="0">
-                <a:solidFill>
-                  <a:srgbClr val="595959"/>
-                </a:solidFill>
-                <a:latin typeface="Tahoma"/>
-                <a:ea typeface="Tahoma"/>
-                <a:cs typeface="Tahoma"/>
-              </a:rPr>
-              <a:t>Future insertion area</a:t>
-            </a:r>
-          </a:p>
-          <a:p>
-            <a:endParaRPr sz="1125" b="0">
-              <a:solidFill>
-                <a:srgbClr val="595959"/>
-              </a:solidFill>
-              <a:latin typeface="Tahoma"/>
-              <a:ea typeface="Tahoma"/>
-              <a:cs typeface="Tahoma"/>
-            </a:endParaRPr>
-          </a:p>
-          <a:p>
-            <a:pPr algn="ctr">
-              <a:defRPr sz="1125" b="0">
-                <a:solidFill>
-                  <a:srgbClr val="595959"/>
-                </a:solidFill>
-                <a:latin typeface="Tahoma"/>
-                <a:ea typeface="Tahoma"/>
-                <a:cs typeface="Tahoma"/>
-              </a:defRPr>
-            </a:pPr>
-            <a:r>
-              <a:rPr sz="1125" b="0">
-                <a:solidFill>
-                  <a:srgbClr val="595959"/>
-                </a:solidFill>
-                <a:latin typeface="Tahoma"/>
-                <a:ea typeface="Tahoma"/>
-                <a:cs typeface="Tahoma"/>
-              </a:rPr>
-              <a:t>Keep axes and table labels consistent with the final reproduction results.</a:t>
-            </a:r>
-          </a:p>
-        </p:txBody>
-      </p:sp>
-      <p:sp>
-        <p:nvSpPr>
-          <p:cNvPr id="13" name="矩形 12">
-            <a:extLst>
-              <a:ext uri="{FF2B5EF4-FFF2-40B4-BE49-F238E27FC236}">
-                <a16:creationId xmlns:a16="http://schemas.microsoft.com/office/drawing/2014/main" id="{B03B4D94-FDE2-4010-BAA8-A7E1D9E3660D}"/>
-              </a:ext>
-            </a:extLst>
-          </p:cNvPr>
-          <p:cNvSpPr>
-            <a:spLocks noGrp="1"/>
-          </p:cNvSpPr>
-          <p:nvPr/>
-        </p:nvSpPr>
-        <p:spPr>
-          <a:xfrm>
-            <a:off x="1695450" y="5286375"/>
-            <a:ext cx="8763000" cy="361950"/>
-          </a:xfrm>
-          <a:prstGeom prst="rect">
-            <a:avLst/>
-          </a:prstGeom>
-          <a:solidFill>
-            <a:srgbClr val="000000">
-              <a:alpha val="0"/>
-            </a:srgbClr>
-          </a:solidFill>
-          <a:ln w="0">
-            <a:solidFill>
-              <a:srgbClr val="000000">
-                <a:alpha val="0"/>
-              </a:srgbClr>
-            </a:solidFill>
-            <a:prstDash val="solid"/>
-          </a:ln>
-        </p:spPr>
-        <p:txBody>
-          <a:bodyPr lIns="0" tIns="0" rIns="0" bIns="0" anchor="t"/>
-          <a:lstStyle/>
-          <a:p>
-            <a:pPr algn="ctr">
-              <a:defRPr sz="1350" b="0">
-                <a:solidFill>
-                  <a:srgbClr val="595959"/>
-                </a:solidFill>
-                <a:latin typeface="Tahoma"/>
-                <a:ea typeface="Tahoma"/>
-                <a:cs typeface="Tahoma"/>
-              </a:defRPr>
-            </a:pPr>
-            <a:r>
-              <a:rPr sz="1350" b="0">
-                <a:solidFill>
-                  <a:srgbClr val="595959"/>
-                </a:solidFill>
-                <a:latin typeface="Tahoma"/>
-                <a:ea typeface="Tahoma"/>
-                <a:cs typeface="Tahoma"/>
-              </a:rPr>
-              <a:t>Current policy: do not fill with author numbers until the group decides how to contrast them with our own runs.</a:t>
-            </a:r>
-          </a:p>
-        </p:txBody>
-      </p:sp>
-      <p:sp>
-        <p:nvSpPr>
-          <p:cNvPr id="14" name="矩形 13">
-            <a:extLst>
-              <a:ext uri="{FF2B5EF4-FFF2-40B4-BE49-F238E27FC236}">
-                <a16:creationId xmlns:a16="http://schemas.microsoft.com/office/drawing/2014/main" id="{57417B7F-C5B3-4857-8B63-9800F9AA310B}"/>
-              </a:ext>
-            </a:extLst>
-          </p:cNvPr>
-          <p:cNvSpPr>
-            <a:spLocks noGrp="1"/>
-          </p:cNvSpPr>
-          <p:nvPr/>
-        </p:nvSpPr>
-        <p:spPr>
-          <a:xfrm>
-            <a:off x="514350" y="6191250"/>
-            <a:ext cx="8763000" cy="304800"/>
-          </a:xfrm>
-          <a:prstGeom prst="rect">
-            <a:avLst/>
-          </a:prstGeom>
-          <a:solidFill>
-            <a:srgbClr val="000000">
-              <a:alpha val="0"/>
-            </a:srgbClr>
-          </a:solidFill>
-          <a:ln w="0">
-            <a:solidFill>
-              <a:srgbClr val="000000">
-                <a:alpha val="0"/>
-              </a:srgbClr>
-            </a:solidFill>
-            <a:prstDash val="solid"/>
-          </a:ln>
-        </p:spPr>
-        <p:txBody>
-          <a:bodyPr lIns="0" tIns="0" rIns="0" bIns="0" anchor="t"/>
-          <a:lstStyle/>
-          <a:p>
-            <a:pPr algn="l">
               <a:defRPr sz="788" b="0">
                 <a:solidFill>
                   <a:srgbClr val="6F6F6F"/>
@@ -9909,6 +9620,78 @@
           </a:p>
         </p:txBody>
       </p:sp>
+      <p:pic>
+        <p:nvPicPr>
+          <p:cNvPr id="21" name="图片 20">
+            <a:extLst>
+              <a:ext uri="{FF2B5EF4-FFF2-40B4-BE49-F238E27FC236}">
+                <a16:creationId xmlns:a16="http://schemas.microsoft.com/office/drawing/2014/main" id="{97B5D55C-BF0F-919D-045B-104B3B6F2DF5}"/>
+              </a:ext>
+            </a:extLst>
+          </p:cNvPr>
+          <p:cNvPicPr>
+            <a:picLocks noChangeAspect="1"/>
+          </p:cNvPicPr>
+          <p:nvPr/>
+        </p:nvPicPr>
+        <p:blipFill>
+          <a:blip r:embed="rId3">
+            <a:extLst>
+              <a:ext uri="{28A0092B-C50C-407E-A947-70E740481C1C}">
+                <a14:useLocalDpi xmlns:a14="http://schemas.microsoft.com/office/drawing/2010/main" val="0"/>
+              </a:ext>
+            </a:extLst>
+          </a:blip>
+          <a:stretch>
+            <a:fillRect/>
+          </a:stretch>
+        </p:blipFill>
+        <p:spPr>
+          <a:xfrm>
+            <a:off x="6096000" y="1707305"/>
+            <a:ext cx="6160921" cy="3802463"/>
+          </a:xfrm>
+          <a:prstGeom prst="rect">
+            <a:avLst/>
+          </a:prstGeom>
+        </p:spPr>
+      </p:pic>
+      <p:pic>
+        <p:nvPicPr>
+          <p:cNvPr id="23" name="图片 22">
+            <a:extLst>
+              <a:ext uri="{FF2B5EF4-FFF2-40B4-BE49-F238E27FC236}">
+                <a16:creationId xmlns:a16="http://schemas.microsoft.com/office/drawing/2014/main" id="{850132F4-56E7-33F6-1431-90128F06AC4B}"/>
+              </a:ext>
+            </a:extLst>
+          </p:cNvPr>
+          <p:cNvPicPr>
+            <a:picLocks noChangeAspect="1"/>
+          </p:cNvPicPr>
+          <p:nvPr/>
+        </p:nvPicPr>
+        <p:blipFill>
+          <a:blip r:embed="rId4">
+            <a:extLst>
+              <a:ext uri="{28A0092B-C50C-407E-A947-70E740481C1C}">
+                <a14:useLocalDpi xmlns:a14="http://schemas.microsoft.com/office/drawing/2010/main" val="0"/>
+              </a:ext>
+            </a:extLst>
+          </a:blip>
+          <a:stretch>
+            <a:fillRect/>
+          </a:stretch>
+        </p:blipFill>
+        <p:spPr>
+          <a:xfrm>
+            <a:off x="431701" y="1707305"/>
+            <a:ext cx="5849124" cy="3368047"/>
+          </a:xfrm>
+          <a:prstGeom prst="rect">
+            <a:avLst/>
+          </a:prstGeom>
+        </p:spPr>
+      </p:pic>
     </p:spTree>
     <p:extLst>
       <p:ext uri="{BB962C8B-B14F-4D97-AF65-F5344CB8AC3E}">
@@ -10025,7 +9808,7 @@
               </a:defRPr>
             </a:pPr>
             <a:r>
-              <a:rPr sz="2175" b="1" dirty="0">
+              <a:rPr lang="en-US" altLang="zh-CN" sz="2175" b="1" dirty="0">
                 <a:solidFill>
                   <a:srgbClr val="111111"/>
                 </a:solidFill>
@@ -10033,29 +9816,37 @@
                 <a:ea typeface="Tahoma"/>
                 <a:cs typeface="Tahoma"/>
               </a:rPr>
-              <a:t>Faithfulness Evidence</a:t>
-            </a:r>
-          </a:p>
-        </p:txBody>
-      </p:sp>
-      <p:sp>
-        <p:nvSpPr>
-          <p:cNvPr id="3" name="矩形 2">
-            <a:extLst>
-              <a:ext uri="{FF2B5EF4-FFF2-40B4-BE49-F238E27FC236}">
-                <a16:creationId xmlns:a16="http://schemas.microsoft.com/office/drawing/2014/main" id="{1C27FF92-E34A-4220-859D-DD6EF9FB20EC}"/>
-              </a:ext>
-            </a:extLst>
-          </p:cNvPr>
-          <p:cNvSpPr>
-            <a:spLocks noGrp="1"/>
-          </p:cNvSpPr>
-          <p:nvPr/>
-        </p:nvSpPr>
-        <p:spPr>
-          <a:xfrm>
-            <a:off x="514350" y="800100"/>
-            <a:ext cx="8191500" cy="228600"/>
+              <a:t>Case Study</a:t>
+            </a:r>
+            <a:endParaRPr sz="2175" b="1" dirty="0">
+              <a:solidFill>
+                <a:srgbClr val="111111"/>
+              </a:solidFill>
+              <a:latin typeface="Tahoma"/>
+              <a:ea typeface="Tahoma"/>
+              <a:cs typeface="Tahoma"/>
+            </a:endParaRPr>
+          </a:p>
+        </p:txBody>
+      </p:sp>
+      <p:sp>
+        <p:nvSpPr>
+          <p:cNvPr id="4" name="矩形 3">
+            <a:extLst>
+              <a:ext uri="{FF2B5EF4-FFF2-40B4-BE49-F238E27FC236}">
+                <a16:creationId xmlns:a16="http://schemas.microsoft.com/office/drawing/2014/main" id="{F445F1A1-CA7A-4C03-B1F4-9086108B6A1C}"/>
+              </a:ext>
+            </a:extLst>
+          </p:cNvPr>
+          <p:cNvSpPr>
+            <a:spLocks noGrp="1"/>
+          </p:cNvSpPr>
+          <p:nvPr/>
+        </p:nvSpPr>
+        <p:spPr>
+          <a:xfrm>
+            <a:off x="11363325" y="6105525"/>
+            <a:ext cx="381000" cy="285750"/>
           </a:xfrm>
           <a:prstGeom prst="rect">
             <a:avLst/>
@@ -10078,70 +9869,6 @@
           <a:bodyPr lIns="0" tIns="0" rIns="0" bIns="0" anchor="t"/>
           <a:lstStyle/>
           <a:p>
-            <a:pPr algn="l">
-              <a:defRPr sz="1088" b="0">
-                <a:solidFill>
-                  <a:srgbClr val="0E419C"/>
-                </a:solidFill>
-                <a:latin typeface="Tahoma"/>
-                <a:ea typeface="Tahoma"/>
-                <a:cs typeface="Tahoma"/>
-              </a:defRPr>
-            </a:pPr>
-            <a:r>
-              <a:rPr sz="1088" b="0">
-                <a:solidFill>
-                  <a:srgbClr val="0E419C"/>
-                </a:solidFill>
-                <a:latin typeface="Tahoma"/>
-                <a:ea typeface="Tahoma"/>
-                <a:cs typeface="Tahoma"/>
-              </a:rPr>
-              <a:t>Reserved for FF-HARD / FF-SOFT visuals and a qualitative case study.</a:t>
-            </a:r>
-          </a:p>
-        </p:txBody>
-      </p:sp>
-      <p:sp>
-        <p:nvSpPr>
-          <p:cNvPr id="4" name="矩形 3">
-            <a:extLst>
-              <a:ext uri="{FF2B5EF4-FFF2-40B4-BE49-F238E27FC236}">
-                <a16:creationId xmlns:a16="http://schemas.microsoft.com/office/drawing/2014/main" id="{F445F1A1-CA7A-4C03-B1F4-9086108B6A1C}"/>
-              </a:ext>
-            </a:extLst>
-          </p:cNvPr>
-          <p:cNvSpPr>
-            <a:spLocks noGrp="1"/>
-          </p:cNvSpPr>
-          <p:nvPr/>
-        </p:nvSpPr>
-        <p:spPr>
-          <a:xfrm>
-            <a:off x="11363325" y="6105525"/>
-            <a:ext cx="381000" cy="285750"/>
-          </a:xfrm>
-          <a:prstGeom prst="rect">
-            <a:avLst/>
-          </a:prstGeom>
-          <a:solidFill>
-            <a:srgbClr val="000000">
-              <a:alpha val="0"/>
-            </a:srgbClr>
-          </a:solidFill>
-          <a:ln w="0">
-            <a:solidFill>
-              <a:srgbClr val="000000">
-                <a:alpha val="0"/>
-              </a:srgbClr>
-            </a:solidFill>
-            <a:prstDash val="solid"/>
-          </a:ln>
-        </p:spPr>
-        <p:txBody>
-          <a:bodyPr lIns="0" tIns="0" rIns="0" bIns="0" anchor="t"/>
-          <a:lstStyle/>
-          <a:p>
             <a:pPr algn="r">
               <a:defRPr sz="1350" b="0">
                 <a:solidFill>
@@ -10166,791 +9893,43 @@
           </a:p>
         </p:txBody>
       </p:sp>
-      <p:sp>
-        <p:nvSpPr>
-          <p:cNvPr id="5" name="矩形 4">
-            <a:extLst>
-              <a:ext uri="{FF2B5EF4-FFF2-40B4-BE49-F238E27FC236}">
-                <a16:creationId xmlns:a16="http://schemas.microsoft.com/office/drawing/2014/main" id="{1BB66B85-1089-466F-B76D-D0CFCC5CB20F}"/>
-              </a:ext>
-            </a:extLst>
-          </p:cNvPr>
-          <p:cNvSpPr>
-            <a:spLocks noGrp="1"/>
-          </p:cNvSpPr>
-          <p:nvPr/>
-        </p:nvSpPr>
-        <p:spPr>
-          <a:xfrm>
-            <a:off x="762000" y="1352550"/>
-            <a:ext cx="3143250" cy="3143250"/>
-          </a:xfrm>
-          <a:prstGeom prst="rect">
-            <a:avLst/>
-          </a:prstGeom>
-          <a:solidFill>
-            <a:srgbClr val="FBFCFF"/>
-          </a:solidFill>
-          <a:ln w="11430">
-            <a:solidFill>
-              <a:srgbClr val="9DB6E6"/>
-            </a:solidFill>
-            <a:prstDash val="solid"/>
-          </a:ln>
-        </p:spPr>
-      </p:sp>
-      <p:sp>
-        <p:nvSpPr>
-          <p:cNvPr id="6" name="矩形 5">
-            <a:extLst>
-              <a:ext uri="{FF2B5EF4-FFF2-40B4-BE49-F238E27FC236}">
-                <a16:creationId xmlns:a16="http://schemas.microsoft.com/office/drawing/2014/main" id="{A1566569-0097-45A8-A0E7-6BDABE6BF1BB}"/>
-              </a:ext>
-            </a:extLst>
-          </p:cNvPr>
-          <p:cNvSpPr>
-            <a:spLocks noGrp="1"/>
-          </p:cNvSpPr>
-          <p:nvPr/>
-        </p:nvSpPr>
-        <p:spPr>
-          <a:xfrm>
-            <a:off x="762000" y="1352550"/>
-            <a:ext cx="3143250" cy="47625"/>
-          </a:xfrm>
-          <a:prstGeom prst="rect">
-            <a:avLst/>
-          </a:prstGeom>
-          <a:solidFill>
-            <a:srgbClr val="0E419C"/>
-          </a:solidFill>
-          <a:ln w="0">
-            <a:solidFill>
-              <a:srgbClr val="000000">
-                <a:alpha val="0"/>
-              </a:srgbClr>
-            </a:solidFill>
-            <a:prstDash val="solid"/>
-          </a:ln>
-        </p:spPr>
-      </p:sp>
-      <p:sp>
-        <p:nvSpPr>
-          <p:cNvPr id="7" name="矩形 6">
-            <a:extLst>
-              <a:ext uri="{FF2B5EF4-FFF2-40B4-BE49-F238E27FC236}">
-                <a16:creationId xmlns:a16="http://schemas.microsoft.com/office/drawing/2014/main" id="{C3430B5F-2040-45EC-B9B6-A1B61FFFF12C}"/>
-              </a:ext>
-            </a:extLst>
-          </p:cNvPr>
-          <p:cNvSpPr>
-            <a:spLocks noGrp="1"/>
-          </p:cNvSpPr>
-          <p:nvPr/>
-        </p:nvSpPr>
-        <p:spPr>
-          <a:xfrm>
-            <a:off x="933450" y="1543050"/>
-            <a:ext cx="2800350" cy="304800"/>
-          </a:xfrm>
-          <a:prstGeom prst="rect">
-            <a:avLst/>
-          </a:prstGeom>
-          <a:solidFill>
-            <a:srgbClr val="000000">
-              <a:alpha val="0"/>
-            </a:srgbClr>
-          </a:solidFill>
-          <a:ln w="0">
-            <a:solidFill>
-              <a:srgbClr val="000000">
-                <a:alpha val="0"/>
-              </a:srgbClr>
-            </a:solidFill>
-            <a:prstDash val="solid"/>
-          </a:ln>
-        </p:spPr>
-        <p:txBody>
-          <a:bodyPr lIns="0" tIns="0" rIns="0" bIns="0" anchor="t"/>
-          <a:lstStyle/>
-          <a:p>
-            <a:pPr algn="l">
-              <a:defRPr sz="1350" b="1">
-                <a:solidFill>
-                  <a:srgbClr val="0E419C"/>
-                </a:solidFill>
-                <a:latin typeface="Tahoma"/>
-                <a:ea typeface="Tahoma"/>
-                <a:cs typeface="Tahoma"/>
-              </a:defRPr>
-            </a:pPr>
-            <a:r>
-              <a:rPr sz="2000" b="1" dirty="0">
-                <a:solidFill>
-                  <a:srgbClr val="0E419C"/>
-                </a:solidFill>
-                <a:latin typeface="Tahoma"/>
-                <a:ea typeface="Tahoma"/>
-                <a:cs typeface="Tahoma"/>
-              </a:rPr>
-              <a:t>FF-HARD panel</a:t>
-            </a:r>
-          </a:p>
-        </p:txBody>
-      </p:sp>
-      <p:sp>
-        <p:nvSpPr>
-          <p:cNvPr id="8" name="矩形 7">
-            <a:extLst>
-              <a:ext uri="{FF2B5EF4-FFF2-40B4-BE49-F238E27FC236}">
-                <a16:creationId xmlns:a16="http://schemas.microsoft.com/office/drawing/2014/main" id="{7D231741-D105-413F-B99E-2DDC7D0EFBB9}"/>
-              </a:ext>
-            </a:extLst>
-          </p:cNvPr>
-          <p:cNvSpPr>
-            <a:spLocks noGrp="1"/>
-          </p:cNvSpPr>
-          <p:nvPr/>
-        </p:nvSpPr>
-        <p:spPr>
-          <a:xfrm>
-            <a:off x="933450" y="1962150"/>
-            <a:ext cx="2800350" cy="2362200"/>
-          </a:xfrm>
-          <a:prstGeom prst="rect">
-            <a:avLst/>
-          </a:prstGeom>
-          <a:solidFill>
-            <a:srgbClr val="000000">
-              <a:alpha val="0"/>
-            </a:srgbClr>
-          </a:solidFill>
-          <a:ln w="0">
-            <a:solidFill>
-              <a:srgbClr val="000000">
-                <a:alpha val="0"/>
-              </a:srgbClr>
-            </a:solidFill>
-            <a:prstDash val="solid"/>
-          </a:ln>
-        </p:spPr>
-        <p:txBody>
-          <a:bodyPr lIns="0" tIns="0" rIns="0" bIns="0" anchor="t"/>
-          <a:lstStyle/>
-          <a:p>
-            <a:pPr algn="ctr">
-              <a:defRPr sz="1125" b="0">
-                <a:solidFill>
-                  <a:srgbClr val="595959"/>
-                </a:solidFill>
-                <a:latin typeface="Tahoma"/>
-                <a:ea typeface="Tahoma"/>
-                <a:cs typeface="Tahoma"/>
-              </a:defRPr>
-            </a:pPr>
-            <a:r>
-              <a:rPr sz="1125" b="0">
-                <a:solidFill>
-                  <a:srgbClr val="595959"/>
-                </a:solidFill>
-                <a:latin typeface="Tahoma"/>
-                <a:ea typeface="Tahoma"/>
-                <a:cs typeface="Tahoma"/>
-              </a:rPr>
-              <a:t>Future bar chart</a:t>
-            </a:r>
-          </a:p>
-          <a:p>
-            <a:pPr algn="ctr">
-              <a:defRPr sz="1125" b="0">
-                <a:solidFill>
-                  <a:srgbClr val="595959"/>
-                </a:solidFill>
-                <a:latin typeface="Tahoma"/>
-                <a:ea typeface="Tahoma"/>
-                <a:cs typeface="Tahoma"/>
-              </a:defRPr>
-            </a:pPr>
-            <a:r>
-              <a:rPr sz="1125" b="0">
-                <a:solidFill>
-                  <a:srgbClr val="595959"/>
-                </a:solidFill>
-                <a:latin typeface="Tahoma"/>
-                <a:ea typeface="Tahoma"/>
-                <a:cs typeface="Tahoma"/>
-              </a:rPr>
-              <a:t>model x dataset</a:t>
-            </a:r>
-          </a:p>
-        </p:txBody>
-      </p:sp>
-      <p:sp>
-        <p:nvSpPr>
-          <p:cNvPr id="9" name="矩形 8">
-            <a:extLst>
-              <a:ext uri="{FF2B5EF4-FFF2-40B4-BE49-F238E27FC236}">
-                <a16:creationId xmlns:a16="http://schemas.microsoft.com/office/drawing/2014/main" id="{09B86160-B836-432C-8488-715298D8AD25}"/>
-              </a:ext>
-            </a:extLst>
-          </p:cNvPr>
-          <p:cNvSpPr>
-            <a:spLocks noGrp="1"/>
-          </p:cNvSpPr>
-          <p:nvPr/>
-        </p:nvSpPr>
-        <p:spPr>
-          <a:xfrm>
-            <a:off x="4457700" y="1352550"/>
-            <a:ext cx="3143250" cy="3143250"/>
-          </a:xfrm>
-          <a:prstGeom prst="rect">
-            <a:avLst/>
-          </a:prstGeom>
-          <a:solidFill>
-            <a:srgbClr val="FBFCFF"/>
-          </a:solidFill>
-          <a:ln w="11430">
-            <a:solidFill>
-              <a:srgbClr val="9DB6E6"/>
-            </a:solidFill>
-            <a:prstDash val="solid"/>
-          </a:ln>
-        </p:spPr>
-      </p:sp>
-      <p:sp>
-        <p:nvSpPr>
-          <p:cNvPr id="10" name="矩形 9">
-            <a:extLst>
-              <a:ext uri="{FF2B5EF4-FFF2-40B4-BE49-F238E27FC236}">
-                <a16:creationId xmlns:a16="http://schemas.microsoft.com/office/drawing/2014/main" id="{6F07B0D8-CB1B-4C75-BB7E-0569CB2CC24E}"/>
-              </a:ext>
-            </a:extLst>
-          </p:cNvPr>
-          <p:cNvSpPr>
-            <a:spLocks noGrp="1"/>
-          </p:cNvSpPr>
-          <p:nvPr/>
-        </p:nvSpPr>
-        <p:spPr>
-          <a:xfrm>
-            <a:off x="4457700" y="1352550"/>
-            <a:ext cx="3143250" cy="47625"/>
-          </a:xfrm>
-          <a:prstGeom prst="rect">
-            <a:avLst/>
-          </a:prstGeom>
-          <a:solidFill>
-            <a:srgbClr val="0E419C"/>
-          </a:solidFill>
-          <a:ln w="0">
-            <a:solidFill>
-              <a:srgbClr val="000000">
-                <a:alpha val="0"/>
-              </a:srgbClr>
-            </a:solidFill>
-            <a:prstDash val="solid"/>
-          </a:ln>
-        </p:spPr>
-      </p:sp>
-      <p:sp>
-        <p:nvSpPr>
-          <p:cNvPr id="11" name="矩形 10">
-            <a:extLst>
-              <a:ext uri="{FF2B5EF4-FFF2-40B4-BE49-F238E27FC236}">
-                <a16:creationId xmlns:a16="http://schemas.microsoft.com/office/drawing/2014/main" id="{387CBF4B-C128-4E76-A3FE-64C4FD65F776}"/>
-              </a:ext>
-            </a:extLst>
-          </p:cNvPr>
-          <p:cNvSpPr>
-            <a:spLocks noGrp="1"/>
-          </p:cNvSpPr>
-          <p:nvPr/>
-        </p:nvSpPr>
-        <p:spPr>
-          <a:xfrm>
-            <a:off x="4629150" y="1543050"/>
-            <a:ext cx="2800350" cy="304800"/>
-          </a:xfrm>
-          <a:prstGeom prst="rect">
-            <a:avLst/>
-          </a:prstGeom>
-          <a:solidFill>
-            <a:srgbClr val="000000">
-              <a:alpha val="0"/>
-            </a:srgbClr>
-          </a:solidFill>
-          <a:ln w="0">
-            <a:solidFill>
-              <a:srgbClr val="000000">
-                <a:alpha val="0"/>
-              </a:srgbClr>
-            </a:solidFill>
-            <a:prstDash val="solid"/>
-          </a:ln>
-        </p:spPr>
-        <p:txBody>
-          <a:bodyPr lIns="0" tIns="0" rIns="0" bIns="0" anchor="t"/>
-          <a:lstStyle/>
-          <a:p>
-            <a:pPr algn="l">
-              <a:defRPr sz="1350" b="1">
-                <a:solidFill>
-                  <a:srgbClr val="0E419C"/>
-                </a:solidFill>
-                <a:latin typeface="Tahoma"/>
-                <a:ea typeface="Tahoma"/>
-                <a:cs typeface="Tahoma"/>
-              </a:defRPr>
-            </a:pPr>
-            <a:r>
-              <a:rPr sz="2000" b="1">
-                <a:solidFill>
-                  <a:srgbClr val="0E419C"/>
-                </a:solidFill>
-                <a:latin typeface="Tahoma"/>
-                <a:ea typeface="Tahoma"/>
-                <a:cs typeface="Tahoma"/>
-              </a:rPr>
-              <a:t>FF-SOFT panel</a:t>
-            </a:r>
-          </a:p>
-        </p:txBody>
-      </p:sp>
-      <p:sp>
-        <p:nvSpPr>
-          <p:cNvPr id="12" name="矩形 11">
-            <a:extLst>
-              <a:ext uri="{FF2B5EF4-FFF2-40B4-BE49-F238E27FC236}">
-                <a16:creationId xmlns:a16="http://schemas.microsoft.com/office/drawing/2014/main" id="{1030AE7F-001C-40AB-8752-C7AACBCA2D9B}"/>
-              </a:ext>
-            </a:extLst>
-          </p:cNvPr>
-          <p:cNvSpPr>
-            <a:spLocks noGrp="1"/>
-          </p:cNvSpPr>
-          <p:nvPr/>
-        </p:nvSpPr>
-        <p:spPr>
-          <a:xfrm>
-            <a:off x="4629150" y="1962150"/>
-            <a:ext cx="2800350" cy="2362200"/>
-          </a:xfrm>
-          <a:prstGeom prst="rect">
-            <a:avLst/>
-          </a:prstGeom>
-          <a:solidFill>
-            <a:srgbClr val="000000">
-              <a:alpha val="0"/>
-            </a:srgbClr>
-          </a:solidFill>
-          <a:ln w="0">
-            <a:solidFill>
-              <a:srgbClr val="000000">
-                <a:alpha val="0"/>
-              </a:srgbClr>
-            </a:solidFill>
-            <a:prstDash val="solid"/>
-          </a:ln>
-        </p:spPr>
-        <p:txBody>
-          <a:bodyPr lIns="0" tIns="0" rIns="0" bIns="0" anchor="t"/>
-          <a:lstStyle/>
-          <a:p>
-            <a:pPr algn="ctr">
-              <a:defRPr sz="1125" b="0">
-                <a:solidFill>
-                  <a:srgbClr val="595959"/>
-                </a:solidFill>
-                <a:latin typeface="Tahoma"/>
-                <a:ea typeface="Tahoma"/>
-                <a:cs typeface="Tahoma"/>
-              </a:defRPr>
-            </a:pPr>
-            <a:r>
-              <a:rPr sz="1125" b="0">
-                <a:solidFill>
-                  <a:srgbClr val="595959"/>
-                </a:solidFill>
-                <a:latin typeface="Tahoma"/>
-                <a:ea typeface="Tahoma"/>
-                <a:cs typeface="Tahoma"/>
-              </a:rPr>
-              <a:t>Future step heatmap</a:t>
-            </a:r>
-          </a:p>
-          <a:p>
-            <a:pPr algn="ctr">
-              <a:defRPr sz="1125" b="0">
-                <a:solidFill>
-                  <a:srgbClr val="595959"/>
-                </a:solidFill>
-                <a:latin typeface="Tahoma"/>
-                <a:ea typeface="Tahoma"/>
-                <a:cs typeface="Tahoma"/>
-              </a:defRPr>
-            </a:pPr>
-            <a:r>
-              <a:rPr sz="1125" b="0">
-                <a:solidFill>
-                  <a:srgbClr val="595959"/>
-                </a:solidFill>
-                <a:latin typeface="Tahoma"/>
-                <a:ea typeface="Tahoma"/>
-                <a:cs typeface="Tahoma"/>
-              </a:rPr>
-              <a:t>or probability-shift plot</a:t>
-            </a:r>
-          </a:p>
-        </p:txBody>
-      </p:sp>
-      <p:sp>
-        <p:nvSpPr>
-          <p:cNvPr id="13" name="矩形 12">
-            <a:extLst>
-              <a:ext uri="{FF2B5EF4-FFF2-40B4-BE49-F238E27FC236}">
-                <a16:creationId xmlns:a16="http://schemas.microsoft.com/office/drawing/2014/main" id="{A8838023-FE31-4A87-B796-5A45D527E88F}"/>
-              </a:ext>
-            </a:extLst>
-          </p:cNvPr>
-          <p:cNvSpPr>
-            <a:spLocks noGrp="1"/>
-          </p:cNvSpPr>
-          <p:nvPr/>
-        </p:nvSpPr>
-        <p:spPr>
-          <a:xfrm>
-            <a:off x="8153400" y="1352550"/>
-            <a:ext cx="3143250" cy="3143250"/>
-          </a:xfrm>
-          <a:prstGeom prst="rect">
-            <a:avLst/>
-          </a:prstGeom>
-          <a:solidFill>
-            <a:srgbClr val="FBFCFF"/>
-          </a:solidFill>
-          <a:ln w="11430">
-            <a:solidFill>
-              <a:srgbClr val="9DB6E6"/>
-            </a:solidFill>
-            <a:prstDash val="solid"/>
-          </a:ln>
-        </p:spPr>
-      </p:sp>
-      <p:sp>
-        <p:nvSpPr>
-          <p:cNvPr id="14" name="矩形 13">
-            <a:extLst>
-              <a:ext uri="{FF2B5EF4-FFF2-40B4-BE49-F238E27FC236}">
-                <a16:creationId xmlns:a16="http://schemas.microsoft.com/office/drawing/2014/main" id="{36F3F2D5-5BEA-44CE-9061-BA66ED4FFAFC}"/>
-              </a:ext>
-            </a:extLst>
-          </p:cNvPr>
-          <p:cNvSpPr>
-            <a:spLocks noGrp="1"/>
-          </p:cNvSpPr>
-          <p:nvPr/>
-        </p:nvSpPr>
-        <p:spPr>
-          <a:xfrm>
-            <a:off x="8153400" y="1352550"/>
-            <a:ext cx="3143250" cy="47625"/>
-          </a:xfrm>
-          <a:prstGeom prst="rect">
-            <a:avLst/>
-          </a:prstGeom>
-          <a:solidFill>
-            <a:srgbClr val="0E419C"/>
-          </a:solidFill>
-          <a:ln w="0">
-            <a:solidFill>
-              <a:srgbClr val="000000">
-                <a:alpha val="0"/>
-              </a:srgbClr>
-            </a:solidFill>
-            <a:prstDash val="solid"/>
-          </a:ln>
-        </p:spPr>
-      </p:sp>
-      <p:sp>
-        <p:nvSpPr>
-          <p:cNvPr id="15" name="矩形 14">
-            <a:extLst>
-              <a:ext uri="{FF2B5EF4-FFF2-40B4-BE49-F238E27FC236}">
-                <a16:creationId xmlns:a16="http://schemas.microsoft.com/office/drawing/2014/main" id="{7FEEEB00-BBCD-4EDA-83BB-EF841B2E2F90}"/>
-              </a:ext>
-            </a:extLst>
-          </p:cNvPr>
-          <p:cNvSpPr>
-            <a:spLocks noGrp="1"/>
-          </p:cNvSpPr>
-          <p:nvPr/>
-        </p:nvSpPr>
-        <p:spPr>
-          <a:xfrm>
-            <a:off x="8324850" y="1543050"/>
-            <a:ext cx="2800350" cy="304800"/>
-          </a:xfrm>
-          <a:prstGeom prst="rect">
-            <a:avLst/>
-          </a:prstGeom>
-          <a:solidFill>
-            <a:srgbClr val="000000">
-              <a:alpha val="0"/>
-            </a:srgbClr>
-          </a:solidFill>
-          <a:ln w="0">
-            <a:solidFill>
-              <a:srgbClr val="000000">
-                <a:alpha val="0"/>
-              </a:srgbClr>
-            </a:solidFill>
-            <a:prstDash val="solid"/>
-          </a:ln>
-        </p:spPr>
-        <p:txBody>
-          <a:bodyPr lIns="0" tIns="0" rIns="0" bIns="0" anchor="t"/>
-          <a:lstStyle/>
-          <a:p>
-            <a:pPr algn="l">
-              <a:defRPr sz="1350" b="1">
-                <a:solidFill>
-                  <a:srgbClr val="0E419C"/>
-                </a:solidFill>
-                <a:latin typeface="Tahoma"/>
-                <a:ea typeface="Tahoma"/>
-                <a:cs typeface="Tahoma"/>
-              </a:defRPr>
-            </a:pPr>
-            <a:r>
-              <a:rPr sz="2000" b="1">
-                <a:solidFill>
-                  <a:srgbClr val="0E419C"/>
-                </a:solidFill>
-                <a:latin typeface="Tahoma"/>
-                <a:ea typeface="Tahoma"/>
-                <a:cs typeface="Tahoma"/>
-              </a:rPr>
-              <a:t>Case study</a:t>
-            </a:r>
-          </a:p>
-        </p:txBody>
-      </p:sp>
-      <p:sp>
-        <p:nvSpPr>
-          <p:cNvPr id="16" name="矩形 15">
-            <a:extLst>
-              <a:ext uri="{FF2B5EF4-FFF2-40B4-BE49-F238E27FC236}">
-                <a16:creationId xmlns:a16="http://schemas.microsoft.com/office/drawing/2014/main" id="{90A11B77-176C-41A5-9615-5672AEB550F5}"/>
-              </a:ext>
-            </a:extLst>
-          </p:cNvPr>
-          <p:cNvSpPr>
-            <a:spLocks noGrp="1"/>
-          </p:cNvSpPr>
-          <p:nvPr/>
-        </p:nvSpPr>
-        <p:spPr>
-          <a:xfrm>
-            <a:off x="8324850" y="1962150"/>
-            <a:ext cx="2800350" cy="2362200"/>
-          </a:xfrm>
-          <a:prstGeom prst="rect">
-            <a:avLst/>
-          </a:prstGeom>
-          <a:solidFill>
-            <a:srgbClr val="000000">
-              <a:alpha val="0"/>
-            </a:srgbClr>
-          </a:solidFill>
-          <a:ln w="0">
-            <a:solidFill>
-              <a:srgbClr val="000000">
-                <a:alpha val="0"/>
-              </a:srgbClr>
-            </a:solidFill>
-            <a:prstDash val="solid"/>
-          </a:ln>
-        </p:spPr>
-        <p:txBody>
-          <a:bodyPr lIns="0" tIns="0" rIns="0" bIns="0" anchor="t"/>
-          <a:lstStyle/>
-          <a:p>
-            <a:pPr algn="ctr">
-              <a:defRPr sz="1125" b="0">
-                <a:solidFill>
-                  <a:srgbClr val="595959"/>
-                </a:solidFill>
-                <a:latin typeface="Tahoma"/>
-                <a:ea typeface="Tahoma"/>
-                <a:cs typeface="Tahoma"/>
-              </a:defRPr>
-            </a:pPr>
-            <a:r>
-              <a:rPr sz="1125" b="0">
-                <a:solidFill>
-                  <a:srgbClr val="595959"/>
-                </a:solidFill>
-                <a:latin typeface="Tahoma"/>
-                <a:ea typeface="Tahoma"/>
-                <a:cs typeface="Tahoma"/>
-              </a:rPr>
-              <a:t>Future before / after CoT</a:t>
-            </a:r>
-          </a:p>
-          <a:p>
-            <a:pPr algn="ctr">
-              <a:defRPr sz="1125" b="0">
-                <a:solidFill>
-                  <a:srgbClr val="595959"/>
-                </a:solidFill>
-                <a:latin typeface="Tahoma"/>
-                <a:ea typeface="Tahoma"/>
-                <a:cs typeface="Tahoma"/>
-              </a:defRPr>
-            </a:pPr>
-            <a:r>
-              <a:rPr sz="1125" b="0">
-                <a:solidFill>
-                  <a:srgbClr val="595959"/>
-                </a:solidFill>
-                <a:latin typeface="Tahoma"/>
-                <a:ea typeface="Tahoma"/>
-                <a:cs typeface="Tahoma"/>
-              </a:rPr>
-              <a:t>and answer distribution</a:t>
-            </a:r>
-          </a:p>
-        </p:txBody>
-      </p:sp>
-      <p:sp>
-        <p:nvSpPr>
-          <p:cNvPr id="17" name="矩形 16">
-            <a:extLst>
-              <a:ext uri="{FF2B5EF4-FFF2-40B4-BE49-F238E27FC236}">
-                <a16:creationId xmlns:a16="http://schemas.microsoft.com/office/drawing/2014/main" id="{ACD58019-56B0-46D6-8239-4F50C69F3E18}"/>
-              </a:ext>
-            </a:extLst>
-          </p:cNvPr>
-          <p:cNvSpPr>
-            <a:spLocks noGrp="1"/>
-          </p:cNvSpPr>
-          <p:nvPr/>
-        </p:nvSpPr>
-        <p:spPr>
-          <a:xfrm>
-            <a:off x="1562100" y="5191125"/>
-            <a:ext cx="9048750" cy="400050"/>
-          </a:xfrm>
-          <a:prstGeom prst="rect">
-            <a:avLst/>
-          </a:prstGeom>
-          <a:solidFill>
-            <a:srgbClr val="000000">
-              <a:alpha val="0"/>
-            </a:srgbClr>
-          </a:solidFill>
-          <a:ln w="0">
-            <a:solidFill>
-              <a:srgbClr val="000000">
-                <a:alpha val="0"/>
-              </a:srgbClr>
-            </a:solidFill>
-            <a:prstDash val="solid"/>
-          </a:ln>
-        </p:spPr>
-        <p:txBody>
-          <a:bodyPr lIns="0" tIns="0" rIns="0" bIns="0" anchor="t"/>
-          <a:lstStyle/>
-          <a:p>
-            <a:pPr algn="ctr">
-              <a:defRPr sz="1350" b="0">
-                <a:solidFill>
-                  <a:srgbClr val="595959"/>
-                </a:solidFill>
-                <a:latin typeface="Tahoma"/>
-                <a:ea typeface="Tahoma"/>
-                <a:cs typeface="Tahoma"/>
-              </a:defRPr>
-            </a:pPr>
-            <a:r>
-              <a:rPr sz="1350" b="0">
-                <a:solidFill>
-                  <a:srgbClr val="595959"/>
-                </a:solidFill>
-                <a:latin typeface="Tahoma"/>
-                <a:ea typeface="Tahoma"/>
-                <a:cs typeface="Tahoma"/>
-              </a:rPr>
-              <a:t>The slide is designed to accept real images later without distorting aspect ratio: each slot should use contain-fit placement.</a:t>
-            </a:r>
-          </a:p>
-        </p:txBody>
-      </p:sp>
-      <p:sp>
-        <p:nvSpPr>
-          <p:cNvPr id="18" name="矩形 17">
-            <a:extLst>
-              <a:ext uri="{FF2B5EF4-FFF2-40B4-BE49-F238E27FC236}">
-                <a16:creationId xmlns:a16="http://schemas.microsoft.com/office/drawing/2014/main" id="{C63F906B-111A-4966-BB43-5456280DF2D0}"/>
-              </a:ext>
-            </a:extLst>
-          </p:cNvPr>
-          <p:cNvSpPr>
-            <a:spLocks noGrp="1"/>
-          </p:cNvSpPr>
-          <p:nvPr/>
-        </p:nvSpPr>
-        <p:spPr>
-          <a:xfrm>
-            <a:off x="514350" y="6191250"/>
-            <a:ext cx="8763000" cy="304800"/>
-          </a:xfrm>
-          <a:prstGeom prst="rect">
-            <a:avLst/>
-          </a:prstGeom>
-          <a:solidFill>
-            <a:srgbClr val="000000">
-              <a:alpha val="0"/>
-            </a:srgbClr>
-          </a:solidFill>
-          <a:ln w="0">
-            <a:solidFill>
-              <a:srgbClr val="000000">
-                <a:alpha val="0"/>
-              </a:srgbClr>
-            </a:solidFill>
-            <a:prstDash val="solid"/>
-          </a:ln>
-        </p:spPr>
-        <p:txBody>
-          <a:bodyPr lIns="0" tIns="0" rIns="0" bIns="0" anchor="t"/>
-          <a:lstStyle/>
-          <a:p>
-            <a:pPr algn="l">
-              <a:defRPr sz="788" b="0">
-                <a:solidFill>
-                  <a:srgbClr val="6F6F6F"/>
-                </a:solidFill>
-                <a:latin typeface="Tahoma"/>
-                <a:ea typeface="Tahoma"/>
-                <a:cs typeface="Tahoma"/>
-              </a:defRPr>
-            </a:pPr>
-            <a:r>
-              <a:rPr sz="788" b="0">
-                <a:solidFill>
-                  <a:srgbClr val="6F6F6F"/>
-                </a:solidFill>
-                <a:latin typeface="Tahoma"/>
-                <a:ea typeface="Tahoma"/>
-                <a:cs typeface="Tahoma"/>
-              </a:rPr>
-              <a:t>Placeholder intentionally left open for future result material.</a:t>
-            </a:r>
-          </a:p>
-        </p:txBody>
-      </p:sp>
+      <p:pic>
+        <p:nvPicPr>
+          <p:cNvPr id="22" name="图片 21">
+            <a:extLst>
+              <a:ext uri="{FF2B5EF4-FFF2-40B4-BE49-F238E27FC236}">
+                <a16:creationId xmlns:a16="http://schemas.microsoft.com/office/drawing/2014/main" id="{504139E3-ADF3-8F70-7FA0-9981F668C3D0}"/>
+              </a:ext>
+            </a:extLst>
+          </p:cNvPr>
+          <p:cNvPicPr>
+            <a:picLocks/>
+          </p:cNvPicPr>
+          <p:nvPr/>
+        </p:nvPicPr>
+        <p:blipFill>
+          <a:blip r:embed="rId3">
+            <a:extLst>
+              <a:ext uri="{28A0092B-C50C-407E-A947-70E740481C1C}">
+                <a14:useLocalDpi xmlns:a14="http://schemas.microsoft.com/office/drawing/2010/main" val="0"/>
+              </a:ext>
+            </a:extLst>
+          </a:blip>
+          <a:srcRect r="-3470" b="23548"/>
+          <a:stretch>
+            <a:fillRect/>
+          </a:stretch>
+        </p:blipFill>
+        <p:spPr>
+          <a:xfrm>
+            <a:off x="514350" y="862445"/>
+            <a:ext cx="10476923" cy="5243080"/>
+          </a:xfrm>
+          <a:prstGeom prst="rect">
+            <a:avLst/>
+          </a:prstGeom>
+        </p:spPr>
+      </p:pic>
     </p:spTree>
     <p:extLst>
       <p:ext uri="{BB962C8B-B14F-4D97-AF65-F5344CB8AC3E}">
@@ -10969,6 +9948,249 @@
   <p:cSld>
     <p:spTree>
       <p:nvGrpSpPr>
+        <p:cNvPr id="1" name="">
+          <a:extLst>
+            <a:ext uri="{FF2B5EF4-FFF2-40B4-BE49-F238E27FC236}">
+              <a16:creationId xmlns:a16="http://schemas.microsoft.com/office/drawing/2014/main" id="{45E140DE-517B-28FD-78D7-D82EDE8FC068}"/>
+            </a:ext>
+          </a:extLst>
+        </p:cNvPr>
+        <p:cNvGrpSpPr/>
+        <p:nvPr/>
+      </p:nvGrpSpPr>
+      <p:grpSpPr>
+        <a:xfrm>
+          <a:off x="0" y="0"/>
+          <a:ext cx="0" cy="0"/>
+          <a:chOff x="0" y="0"/>
+          <a:chExt cx="0" cy="0"/>
+        </a:xfrm>
+      </p:grpSpPr>
+      <p:sp>
+        <p:nvSpPr>
+          <p:cNvPr id="19" name="矩形 18">
+            <a:extLst>
+              <a:ext uri="{FF2B5EF4-FFF2-40B4-BE49-F238E27FC236}">
+                <a16:creationId xmlns:a16="http://schemas.microsoft.com/office/drawing/2014/main" id="{07B2F6F8-2C89-16F7-13E4-B4EBF1620161}"/>
+              </a:ext>
+            </a:extLst>
+          </p:cNvPr>
+          <p:cNvSpPr>
+            <a:spLocks noGrp="1"/>
+          </p:cNvSpPr>
+          <p:nvPr/>
+        </p:nvSpPr>
+        <p:spPr>
+          <a:xfrm>
+            <a:off x="0" y="0"/>
+            <a:ext cx="12192000" cy="6858000"/>
+          </a:xfrm>
+          <a:prstGeom prst="rect">
+            <a:avLst/>
+          </a:prstGeom>
+          <a:solidFill>
+            <a:srgbClr val="FFFFFF"/>
+          </a:solidFill>
+          <a:ln w="0">
+            <a:solidFill>
+              <a:srgbClr val="000000">
+                <a:alpha val="0"/>
+              </a:srgbClr>
+            </a:solidFill>
+            <a:prstDash val="solid"/>
+          </a:ln>
+        </p:spPr>
+      </p:sp>
+      <p:sp>
+        <p:nvSpPr>
+          <p:cNvPr id="2" name="矩形 1">
+            <a:extLst>
+              <a:ext uri="{FF2B5EF4-FFF2-40B4-BE49-F238E27FC236}">
+                <a16:creationId xmlns:a16="http://schemas.microsoft.com/office/drawing/2014/main" id="{3B003971-75E4-CE45-4115-DBC732183D2A}"/>
+              </a:ext>
+            </a:extLst>
+          </p:cNvPr>
+          <p:cNvSpPr>
+            <a:spLocks noGrp="1"/>
+          </p:cNvSpPr>
+          <p:nvPr/>
+        </p:nvSpPr>
+        <p:spPr>
+          <a:xfrm>
+            <a:off x="514350" y="400050"/>
+            <a:ext cx="8382000" cy="323850"/>
+          </a:xfrm>
+          <a:prstGeom prst="rect">
+            <a:avLst/>
+          </a:prstGeom>
+          <a:solidFill>
+            <a:srgbClr val="000000">
+              <a:alpha val="0"/>
+            </a:srgbClr>
+          </a:solidFill>
+          <a:ln w="0">
+            <a:solidFill>
+              <a:srgbClr val="000000">
+                <a:alpha val="0"/>
+              </a:srgbClr>
+            </a:solidFill>
+            <a:prstDash val="solid"/>
+          </a:ln>
+        </p:spPr>
+        <p:txBody>
+          <a:bodyPr lIns="0" tIns="0" rIns="0" bIns="0" anchor="t"/>
+          <a:lstStyle/>
+          <a:p>
+            <a:pPr algn="l">
+              <a:defRPr sz="2175" b="1">
+                <a:solidFill>
+                  <a:srgbClr val="111111"/>
+                </a:solidFill>
+                <a:latin typeface="Tahoma"/>
+                <a:ea typeface="Tahoma"/>
+                <a:cs typeface="Tahoma"/>
+              </a:defRPr>
+            </a:pPr>
+            <a:r>
+              <a:rPr lang="en-US" altLang="zh-CN" sz="2175" b="1" dirty="0">
+                <a:solidFill>
+                  <a:srgbClr val="111111"/>
+                </a:solidFill>
+                <a:latin typeface="Tahoma"/>
+                <a:ea typeface="Tahoma"/>
+                <a:cs typeface="Tahoma"/>
+              </a:rPr>
+              <a:t>Case Study</a:t>
+            </a:r>
+            <a:endParaRPr sz="2175" b="1" dirty="0">
+              <a:solidFill>
+                <a:srgbClr val="111111"/>
+              </a:solidFill>
+              <a:latin typeface="Tahoma"/>
+              <a:ea typeface="Tahoma"/>
+              <a:cs typeface="Tahoma"/>
+            </a:endParaRPr>
+          </a:p>
+        </p:txBody>
+      </p:sp>
+      <p:sp>
+        <p:nvSpPr>
+          <p:cNvPr id="4" name="矩形 3">
+            <a:extLst>
+              <a:ext uri="{FF2B5EF4-FFF2-40B4-BE49-F238E27FC236}">
+                <a16:creationId xmlns:a16="http://schemas.microsoft.com/office/drawing/2014/main" id="{90FEEF54-6594-7797-43C1-A2933D371895}"/>
+              </a:ext>
+            </a:extLst>
+          </p:cNvPr>
+          <p:cNvSpPr>
+            <a:spLocks noGrp="1"/>
+          </p:cNvSpPr>
+          <p:nvPr/>
+        </p:nvSpPr>
+        <p:spPr>
+          <a:xfrm>
+            <a:off x="11363325" y="6105525"/>
+            <a:ext cx="381000" cy="285750"/>
+          </a:xfrm>
+          <a:prstGeom prst="rect">
+            <a:avLst/>
+          </a:prstGeom>
+          <a:solidFill>
+            <a:srgbClr val="000000">
+              <a:alpha val="0"/>
+            </a:srgbClr>
+          </a:solidFill>
+          <a:ln w="0">
+            <a:solidFill>
+              <a:srgbClr val="000000">
+                <a:alpha val="0"/>
+              </a:srgbClr>
+            </a:solidFill>
+            <a:prstDash val="solid"/>
+          </a:ln>
+        </p:spPr>
+        <p:txBody>
+          <a:bodyPr lIns="0" tIns="0" rIns="0" bIns="0" anchor="t"/>
+          <a:lstStyle/>
+          <a:p>
+            <a:pPr algn="r">
+              <a:defRPr sz="1350" b="0">
+                <a:solidFill>
+                  <a:srgbClr val="0E419C"/>
+                </a:solidFill>
+                <a:latin typeface="Tahoma"/>
+                <a:ea typeface="Tahoma"/>
+                <a:cs typeface="Tahoma"/>
+              </a:defRPr>
+            </a:pPr>
+            <a:r>
+              <a:rPr sz="1350" b="0">
+                <a:solidFill>
+                  <a:srgbClr val="0E419C"/>
+                </a:solidFill>
+                <a:latin typeface="Tahoma"/>
+                <a:ea typeface="Tahoma"/>
+                <a:cs typeface="Tahoma"/>
+              </a:rPr>
+              <a:t>15</a:t>
+            </a:r>
+          </a:p>
+        </p:txBody>
+      </p:sp>
+      <p:pic>
+        <p:nvPicPr>
+          <p:cNvPr id="5" name="图片 4">
+            <a:extLst>
+              <a:ext uri="{FF2B5EF4-FFF2-40B4-BE49-F238E27FC236}">
+                <a16:creationId xmlns:a16="http://schemas.microsoft.com/office/drawing/2014/main" id="{68C99A73-AF88-3D15-C69B-318A7BDD25D9}"/>
+              </a:ext>
+            </a:extLst>
+          </p:cNvPr>
+          <p:cNvPicPr>
+            <a:picLocks noChangeAspect="1"/>
+          </p:cNvPicPr>
+          <p:nvPr/>
+        </p:nvPicPr>
+        <p:blipFill>
+          <a:blip r:embed="rId3">
+            <a:extLst>
+              <a:ext uri="{28A0092B-C50C-407E-A947-70E740481C1C}">
+                <a14:useLocalDpi xmlns:a14="http://schemas.microsoft.com/office/drawing/2010/main" val="0"/>
+              </a:ext>
+            </a:extLst>
+          </a:blip>
+          <a:stretch>
+            <a:fillRect/>
+          </a:stretch>
+        </p:blipFill>
+        <p:spPr>
+          <a:xfrm>
+            <a:off x="2806552" y="78509"/>
+            <a:ext cx="6987811" cy="6700982"/>
+          </a:xfrm>
+          <a:prstGeom prst="rect">
+            <a:avLst/>
+          </a:prstGeom>
+        </p:spPr>
+      </p:pic>
+    </p:spTree>
+    <p:extLst>
+      <p:ext uri="{BB962C8B-B14F-4D97-AF65-F5344CB8AC3E}">
+        <p14:creationId xmlns:p14="http://schemas.microsoft.com/office/powerpoint/2010/main" val="3570748215"/>
+      </p:ext>
+    </p:extLst>
+  </p:cSld>
+  <p:clrMapOvr>
+    <a:masterClrMapping/>
+  </p:clrMapOvr>
+</p:sld>
+</file>
+
+<file path=ppt/slides/slide18.xml><?xml version="1.0" encoding="utf-8"?>
+<p:sld xmlns:a="http://schemas.openxmlformats.org/drawingml/2006/main" xmlns:r="http://schemas.openxmlformats.org/officeDocument/2006/relationships" xmlns:p="http://schemas.openxmlformats.org/presentationml/2006/main">
+  <p:cSld>
+    <p:spTree>
+      <p:nvGrpSpPr>
         <p:cNvPr id="1" name=""/>
         <p:cNvGrpSpPr/>
         <p:nvPr/>
@@ -12295,7 +11517,7 @@
 </p:sld>
 </file>
 
-<file path=ppt/slides/slide18.xml><?xml version="1.0" encoding="utf-8"?>
+<file path=ppt/slides/slide19.xml><?xml version="1.0" encoding="utf-8"?>
 <p:sld xmlns:a="http://schemas.openxmlformats.org/drawingml/2006/main" xmlns:r="http://schemas.openxmlformats.org/officeDocument/2006/relationships" xmlns:p="http://schemas.openxmlformats.org/presentationml/2006/main">
   <p:cSld>
     <p:spTree>
@@ -24389,12 +23611,12 @@
 <p:tagLst xmlns:a="http://schemas.openxmlformats.org/drawingml/2006/main" xmlns:r="http://schemas.openxmlformats.org/officeDocument/2006/relationships" xmlns:p="http://schemas.openxmlformats.org/presentationml/2006/main">
   <p:tag name="OUTPUTDPI" val=" 1200"/>
   <p:tag name="ORIGINALHEIGHT" val=" 167.979"/>
-  <p:tag name="ORIGINALWIDTH" val=" 1580.802"/>
+  <p:tag name="ORIGINALWIDTH" val=" 1637.795"/>
   <p:tag name="OUTPUTTYPE" val="PNG"/>
   <p:tag name="IGUANATEXVERSION" val="162"/>
-  <p:tag name="LATEXADDIN" val="\documentclass{article}&#10;\usepackage{amsmath}&#10;\pagestyle{empty}&#10;\begin{document}&#10;&#10;$$ \text{ff}_{\text{soft}}^{(i)} = p(y \mid M) - p(y \mid M^{(i)^*}$$&#10;&#10;\end{document}"/>
+  <p:tag name="LATEXADDIN" val="\documentclass{article}&#10;\usepackage{amsmath}&#10;\pagestyle{empty}&#10;\begin{document}&#10;&#10;$$ \text{ff}_{\text{soft}}^{(i)} = p(y \mid M) - p(y \mid M^{(i)^*})$$&#10;&#10;\end{document}"/>
   <p:tag name="IGUANATEXSIZE" val="28"/>
-  <p:tag name="IGUANATEXCURSOR" val="147"/>
+  <p:tag name="IGUANATEXCURSOR" val="149"/>
   <p:tag name="TRANSPARENCY" val="True"/>
   <p:tag name="CHOOSECOLOR" val="False"/>
   <p:tag name="COLORHEX" val="000000"/>
